--- a/Software Project Management/07.03.2. Vercel.pptx
+++ b/Software Project Management/07.03.2. Vercel.pptx
@@ -5,7 +5,7 @@
     <p:sldMasterId id="2147483708" r:id="rId1"/>
   </p:sldMasterIdLst>
   <p:notesMasterIdLst>
-    <p:notesMasterId r:id="rId10"/>
+    <p:notesMasterId r:id="rId11"/>
   </p:notesMasterIdLst>
   <p:sldIdLst>
     <p:sldId id="256" r:id="rId2"/>
@@ -15,7 +15,8 @@
     <p:sldId id="383" r:id="rId6"/>
     <p:sldId id="464" r:id="rId7"/>
     <p:sldId id="465" r:id="rId8"/>
-    <p:sldId id="343" r:id="rId9"/>
+    <p:sldId id="466" r:id="rId9"/>
+    <p:sldId id="343" r:id="rId10"/>
   </p:sldIdLst>
   <p:sldSz cx="9144000" cy="6858000" type="screen4x3"/>
   <p:notesSz cx="6858000" cy="9144000"/>
@@ -230,7 +231,7 @@
             <a:fld id="{53FB1E61-C19C-4EB9-A84C-BFF45D303BF2}" type="datetimeFigureOut">
               <a:rPr lang="en-US" smtClean="0"/>
               <a:pPr/>
-              <a:t>7/13/2024</a:t>
+              <a:t>8/17/2026</a:t>
             </a:fld>
             <a:endParaRPr lang="en-US"/>
           </a:p>
@@ -687,7 +688,7 @@
               <a:pPr>
                 <a:defRPr/>
               </a:pPr>
-              <a:t>7/13/2024</a:t>
+              <a:t>8/17/2026</a:t>
             </a:fld>
             <a:endParaRPr lang="en-US"/>
           </a:p>
@@ -879,7 +880,7 @@
               <a:pPr>
                 <a:defRPr/>
               </a:pPr>
-              <a:t>7/13/2024</a:t>
+              <a:t>8/17/2026</a:t>
             </a:fld>
             <a:endParaRPr lang="en-US"/>
           </a:p>
@@ -1081,7 +1082,7 @@
               <a:pPr>
                 <a:defRPr/>
               </a:pPr>
-              <a:t>7/13/2024</a:t>
+              <a:t>8/17/2026</a:t>
             </a:fld>
             <a:endParaRPr lang="en-US"/>
           </a:p>
@@ -1273,7 +1274,7 @@
               <a:pPr>
                 <a:defRPr/>
               </a:pPr>
-              <a:t>7/13/2024</a:t>
+              <a:t>8/17/2026</a:t>
             </a:fld>
             <a:endParaRPr lang="en-US"/>
           </a:p>
@@ -1541,7 +1542,7 @@
               <a:pPr>
                 <a:defRPr/>
               </a:pPr>
-              <a:t>7/13/2024</a:t>
+              <a:t>8/17/2026</a:t>
             </a:fld>
             <a:endParaRPr lang="en-US"/>
           </a:p>
@@ -1851,7 +1852,7 @@
               <a:pPr>
                 <a:defRPr/>
               </a:pPr>
-              <a:t>7/13/2024</a:t>
+              <a:t>8/17/2026</a:t>
             </a:fld>
             <a:endParaRPr lang="en-US"/>
           </a:p>
@@ -2295,7 +2296,7 @@
               <a:pPr>
                 <a:defRPr/>
               </a:pPr>
-              <a:t>7/13/2024</a:t>
+              <a:t>8/17/2026</a:t>
             </a:fld>
             <a:endParaRPr lang="en-US"/>
           </a:p>
@@ -2435,7 +2436,7 @@
               <a:pPr>
                 <a:defRPr/>
               </a:pPr>
-              <a:t>7/13/2024</a:t>
+              <a:t>8/17/2026</a:t>
             </a:fld>
             <a:endParaRPr lang="en-US"/>
           </a:p>
@@ -2552,7 +2553,7 @@
               <a:pPr>
                 <a:defRPr/>
               </a:pPr>
-              <a:t>7/13/2024</a:t>
+              <a:t>8/17/2026</a:t>
             </a:fld>
             <a:endParaRPr lang="en-US"/>
           </a:p>
@@ -2851,7 +2852,7 @@
               <a:pPr>
                 <a:defRPr/>
               </a:pPr>
-              <a:t>7/13/2024</a:t>
+              <a:t>8/17/2026</a:t>
             </a:fld>
             <a:endParaRPr lang="en-US"/>
           </a:p>
@@ -3129,7 +3130,7 @@
               <a:pPr>
                 <a:defRPr/>
               </a:pPr>
-              <a:t>7/13/2024</a:t>
+              <a:t>8/17/2026</a:t>
             </a:fld>
             <a:endParaRPr lang="en-US"/>
           </a:p>
@@ -3377,7 +3378,7 @@
               <a:pPr>
                 <a:defRPr/>
               </a:pPr>
-              <a:t>7/13/2024</a:t>
+              <a:t>8/17/2026</a:t>
             </a:fld>
             <a:endParaRPr lang="en-US"/>
           </a:p>
@@ -4494,15 +4495,7 @@
             </a:r>
             <a:r>
               <a:rPr lang="en-US" dirty="0" smtClean="0"/>
-              <a:t>Import </a:t>
-            </a:r>
-            <a:r>
-              <a:rPr lang="en-US" dirty="0" err="1" smtClean="0"/>
-              <a:t>Git</a:t>
-            </a:r>
-            <a:r>
-              <a:rPr lang="en-US" dirty="0" smtClean="0"/>
-              <a:t> Repository</a:t>
+              <a:t>Create Account</a:t>
             </a:r>
             <a:endParaRPr lang="en-US" dirty="0"/>
           </a:p>
@@ -4527,13 +4520,7 @@
               <a:rPr lang="en-US" sz="2400" dirty="0" smtClean="0">
                 <a:hlinkClick r:id="rId2"/>
               </a:rPr>
-              <a:t>https://</a:t>
-            </a:r>
-            <a:r>
-              <a:rPr lang="en-US" sz="2400" dirty="0" smtClean="0">
-                <a:hlinkClick r:id="rId2"/>
-              </a:rPr>
-              <a:t>vercel.com/signup</a:t>
+              <a:t>https://vercel.com/signup</a:t>
             </a:r>
             <a:endParaRPr lang="en-US" sz="2400" dirty="0" smtClean="0"/>
           </a:p>
@@ -4617,7 +4604,11 @@
             <a:pPr algn="l"/>
             <a:r>
               <a:rPr lang="en-US" dirty="0" smtClean="0"/>
-              <a:t>1. </a:t>
+              <a:t>2</a:t>
+            </a:r>
+            <a:r>
+              <a:rPr lang="en-US" dirty="0" smtClean="0"/>
+              <a:t>. </a:t>
             </a:r>
             <a:r>
               <a:rPr lang="en-US" dirty="0" smtClean="0"/>
@@ -4669,6 +4660,38 @@
           </a:p>
         </p:txBody>
       </p:sp>
+      <p:pic>
+        <p:nvPicPr>
+          <p:cNvPr id="1026" name="Picture 2"/>
+          <p:cNvPicPr>
+            <a:picLocks noChangeAspect="1" noChangeArrowheads="1"/>
+          </p:cNvPicPr>
+          <p:nvPr/>
+        </p:nvPicPr>
+        <p:blipFill>
+          <a:blip r:embed="rId3" cstate="print"/>
+          <a:srcRect/>
+          <a:stretch>
+            <a:fillRect/>
+          </a:stretch>
+        </p:blipFill>
+        <p:spPr bwMode="auto">
+          <a:xfrm>
+            <a:off x="1731963" y="2409825"/>
+            <a:ext cx="5680075" cy="3533775"/>
+          </a:xfrm>
+          <a:prstGeom prst="rect">
+            <a:avLst/>
+          </a:prstGeom>
+          <a:noFill/>
+          <a:ln w="9525">
+            <a:noFill/>
+            <a:miter lim="800000"/>
+            <a:headEnd/>
+            <a:tailEnd/>
+          </a:ln>
+        </p:spPr>
+      </p:pic>
     </p:spTree>
   </p:cSld>
   <p:clrMapOvr>
@@ -4678,6 +4701,125 @@
 </file>
 
 <file path=ppt/slides/slide8.xml><?xml version="1.0" encoding="utf-8"?>
+<p:sld xmlns:a="http://schemas.openxmlformats.org/drawingml/2006/main" xmlns:r="http://schemas.openxmlformats.org/officeDocument/2006/relationships" xmlns:p="http://schemas.openxmlformats.org/presentationml/2006/main">
+  <p:cSld>
+    <p:spTree>
+      <p:nvGrpSpPr>
+        <p:cNvPr id="1" name=""/>
+        <p:cNvGrpSpPr/>
+        <p:nvPr/>
+      </p:nvGrpSpPr>
+      <p:grpSpPr>
+        <a:xfrm>
+          <a:off x="0" y="0"/>
+          <a:ext cx="0" cy="0"/>
+          <a:chOff x="0" y="0"/>
+          <a:chExt cx="0" cy="0"/>
+        </a:xfrm>
+      </p:grpSpPr>
+      <p:sp>
+        <p:nvSpPr>
+          <p:cNvPr id="2" name="Title 1"/>
+          <p:cNvSpPr>
+            <a:spLocks noGrp="1"/>
+          </p:cNvSpPr>
+          <p:nvPr>
+            <p:ph type="title"/>
+          </p:nvPr>
+        </p:nvSpPr>
+        <p:spPr/>
+        <p:txBody>
+          <a:bodyPr/>
+          <a:lstStyle/>
+          <a:p>
+            <a:pPr algn="l"/>
+            <a:r>
+              <a:rPr lang="en-US" dirty="0" smtClean="0"/>
+              <a:t>3</a:t>
+            </a:r>
+            <a:r>
+              <a:rPr lang="en-US" dirty="0" smtClean="0"/>
+              <a:t>. Create Full Access Token</a:t>
+            </a:r>
+            <a:endParaRPr lang="en-US" dirty="0"/>
+          </a:p>
+        </p:txBody>
+      </p:sp>
+      <p:sp>
+        <p:nvSpPr>
+          <p:cNvPr id="3" name="Content Placeholder 2"/>
+          <p:cNvSpPr>
+            <a:spLocks noGrp="1"/>
+          </p:cNvSpPr>
+          <p:nvPr>
+            <p:ph idx="1"/>
+          </p:nvPr>
+        </p:nvSpPr>
+        <p:spPr/>
+        <p:txBody>
+          <a:bodyPr/>
+          <a:lstStyle/>
+          <a:p>
+            <a:r>
+              <a:rPr lang="en-US" sz="2400" dirty="0" smtClean="0">
+                <a:hlinkClick r:id="rId2"/>
+              </a:rPr>
+              <a:t>https://</a:t>
+            </a:r>
+            <a:r>
+              <a:rPr lang="en-US" sz="2400" dirty="0" smtClean="0">
+                <a:hlinkClick r:id="rId2"/>
+              </a:rPr>
+              <a:t>vercel.com/account/tokens</a:t>
+            </a:r>
+            <a:endParaRPr lang="en-US" sz="2400" dirty="0" smtClean="0"/>
+          </a:p>
+          <a:p>
+            <a:endParaRPr lang="en-US" sz="2400" dirty="0"/>
+          </a:p>
+        </p:txBody>
+      </p:sp>
+      <p:pic>
+        <p:nvPicPr>
+          <p:cNvPr id="2051" name="Picture 3"/>
+          <p:cNvPicPr>
+            <a:picLocks noChangeAspect="1" noChangeArrowheads="1"/>
+          </p:cNvPicPr>
+          <p:nvPr/>
+        </p:nvPicPr>
+        <p:blipFill>
+          <a:blip r:embed="rId3" cstate="print"/>
+          <a:srcRect/>
+          <a:stretch>
+            <a:fillRect/>
+          </a:stretch>
+        </p:blipFill>
+        <p:spPr bwMode="auto">
+          <a:xfrm>
+            <a:off x="1066800" y="2514600"/>
+            <a:ext cx="7127240" cy="3162300"/>
+          </a:xfrm>
+          <a:prstGeom prst="rect">
+            <a:avLst/>
+          </a:prstGeom>
+          <a:noFill/>
+          <a:ln w="9525">
+            <a:noFill/>
+            <a:miter lim="800000"/>
+            <a:headEnd/>
+            <a:tailEnd/>
+          </a:ln>
+        </p:spPr>
+      </p:pic>
+    </p:spTree>
+  </p:cSld>
+  <p:clrMapOvr>
+    <a:masterClrMapping/>
+  </p:clrMapOvr>
+</p:sld>
+</file>
+
+<file path=ppt/slides/slide9.xml><?xml version="1.0" encoding="utf-8"?>
 <p:sld xmlns:a="http://schemas.openxmlformats.org/drawingml/2006/main" xmlns:r="http://schemas.openxmlformats.org/officeDocument/2006/relationships" xmlns:p="http://schemas.openxmlformats.org/presentationml/2006/main">
   <p:cSld>
     <p:spTree>
